--- a/Trade_RealValues_Methodology.pptx
+++ b/Trade_RealValues_Methodology.pptx
@@ -18,6 +18,7 @@
     <p:sldId id="263" r:id="rId9"/>
     <p:sldId id="264" r:id="rId10"/>
     <p:sldId id="265" r:id="rId11"/>
+    <p:sldId id="266" r:id="rId17"/>
   </p:sldIdLst>
   <p:sldSz cx="12192000" cy="6858000"/>
   <p:notesSz cx="6858000" cy="12192000"/>
@@ -1856,6 +1857,579 @@
                 <a:cs typeface="Calibri" pitchFamily="34" charset="-120"/>
               </a:rPr>
               <a:t>real values · indices · base unit values · aggregates by country and region · coverage and gap reports · FAOSTAT comparison</a:t>
+            </a:r>
+            <a:endParaRPr lang="en-US" sz="1350" dirty="0"/>
+          </a:p>
+        </p:txBody>
+      </p:sp>
+    </p:spTree>
+  </p:cSld>
+  <p:clrMapOvr>
+    <a:masterClrMapping/>
+  </p:clrMapOvr>
+</p:sld>
+</file>
+
+<file path=ppt/slides/slide11.xml><?xml version="1.0" encoding="utf-8"?>
+<p:sld xmlns:a="http://schemas.openxmlformats.org/drawingml/2006/main" xmlns:p="http://schemas.openxmlformats.org/presentationml/2006/main" xmlns:r="http://schemas.openxmlformats.org/officeDocument/2006/relationships">
+  <p:cSld>
+    <p:spTree>
+      <p:nvGrpSpPr>
+        <p:cNvPr id="1" name=""/>
+        <p:cNvGrpSpPr/>
+        <p:nvPr/>
+      </p:nvGrpSpPr>
+      <p:grpSpPr/>
+      <p:sp>
+        <p:nvSpPr>
+          <p:cNvPr id="2" name="Text 0"/>
+          <p:cNvSpPr/>
+          <p:nvPr/>
+        </p:nvSpPr>
+        <p:spPr>
+          <a:xfrm>
+            <a:off x="640080" y="457200"/>
+            <a:ext cx="10972800" cy="457200"/>
+          </a:xfrm>
+          <a:prstGeom prst="rect">
+            <a:avLst/>
+          </a:prstGeom>
+          <a:noFill/>
+          <a:ln/>
+        </p:spPr>
+        <p:txBody>
+          <a:bodyPr wrap="square" lIns="0" tIns="0" rIns="0" bIns="0" rtlCol="0" anchor="t"/>
+          <a:lstStyle/>
+          <a:p>
+            <a:pPr marL="0" indent="0">
+              <a:buNone/>
+            </a:pPr>
+            <a:r>
+              <a:rPr lang="en-US" sz="2800" b="1" dirty="0">
+                <a:solidFill>
+                  <a:srgbClr val="000000"/>
+                </a:solidFill>
+                <a:latin typeface="Calibri" pitchFamily="34" charset="0"/>
+                <a:ea typeface="Calibri" pitchFamily="34" charset="-122"/>
+                <a:cs typeface="Calibri" pitchFamily="34" charset="-120"/>
+              </a:rPr>
+              <a:t>6. Item groups excluded from the calculations</a:t>
+            </a:r>
+            <a:endParaRPr lang="en-US" sz="2800" dirty="0"/>
+          </a:p>
+        </p:txBody>
+      </p:sp>
+      <p:sp>
+        <p:nvSpPr>
+          <p:cNvPr id="3" name="Text 1"/>
+          <p:cNvSpPr/>
+          <p:nvPr/>
+        </p:nvSpPr>
+        <p:spPr>
+          <a:xfrm>
+            <a:off x="640080" y="1325880"/>
+            <a:ext cx="5486400" cy="365760"/>
+          </a:xfrm>
+          <a:prstGeom prst="rect">
+            <a:avLst/>
+          </a:prstGeom>
+          <a:noFill/>
+          <a:ln/>
+        </p:spPr>
+        <p:txBody>
+          <a:bodyPr wrap="square" lIns="0" tIns="0" rIns="0" bIns="0" rtlCol="0" anchor="t"/>
+          <a:lstStyle/>
+          <a:p>
+            <a:pPr marL="0" indent="0">
+              <a:buNone/>
+            </a:pPr>
+            <a:r>
+              <a:rPr lang="en-US" sz="1500" b="1" dirty="0">
+                <a:solidFill>
+                  <a:srgbClr val="000000"/>
+                </a:solidFill>
+                <a:latin typeface="Calibri" pitchFamily="34" charset="0"/>
+                <a:ea typeface="Calibri" pitchFamily="34" charset="-122"/>
+                <a:cs typeface="Calibri" pitchFamily="34" charset="-120"/>
+              </a:rPr>
+              <a:t>What it means</a:t>
+            </a:r>
+            <a:endParaRPr lang="en-US" sz="1500" b="1" dirty="0"/>
+          </a:p>
+        </p:txBody>
+      </p:sp>
+      <p:sp>
+        <p:nvSpPr>
+          <p:cNvPr id="4" name="Text 2"/>
+          <p:cNvSpPr/>
+          <p:nvPr/>
+        </p:nvSpPr>
+        <p:spPr>
+          <a:xfrm>
+            <a:off x="640080" y="1737360"/>
+            <a:ext cx="10881360" cy="1188720"/>
+          </a:xfrm>
+          <a:prstGeom prst="rect">
+            <a:avLst/>
+          </a:prstGeom>
+          <a:noFill/>
+          <a:ln/>
+        </p:spPr>
+        <p:txBody>
+          <a:bodyPr wrap="square" lIns="0" tIns="0" rIns="0" bIns="0" rtlCol="0" anchor="t"/>
+          <a:lstStyle/>
+          <a:p>
+            <a:pPr marL="190500" indent="-190500">
+              <a:spcAft>
+                <a:spcPts val="1000"/>
+              </a:spcAft>
+              <a:buSzPct val="100000"/>
+              <a:buChar char="•"/>
+            </a:pPr>
+            <a:r>
+              <a:rPr lang="en-US" sz="1400" dirty="0">
+                <a:solidFill>
+                  <a:srgbClr val="000000"/>
+                </a:solidFill>
+                <a:latin typeface="Calibri" pitchFamily="34" charset="0"/>
+                <a:ea typeface="Calibri" pitchFamily="34" charset="-122"/>
+                <a:cs typeface="Calibri" pitchFamily="34" charset="-120"/>
+              </a:rPr>
+              <a:t>11 item groups in DisseminationList.csv are not calculated: no real values and no indices, for countries or regions</a:t>
+            </a:r>
+            <a:endParaRPr lang="en-US" sz="1400" dirty="0"/>
+          </a:p>
+          <a:p>
+            <a:pPr marL="190500" indent="-190500">
+              <a:spcAft>
+                <a:spcPts val="1000"/>
+              </a:spcAft>
+              <a:buSzPct val="100000"/>
+              <a:buChar char="•"/>
+            </a:pPr>
+            <a:r>
+              <a:rPr lang="en-US" sz="1400" dirty="0">
+                <a:solidFill>
+                  <a:srgbClr val="000000"/>
+                </a:solidFill>
+                <a:latin typeface="Calibri" pitchFamily="34" charset="0"/>
+                <a:ea typeface="Calibri" pitchFamily="34" charset="-122"/>
+                <a:cs typeface="Calibri" pitchFamily="34" charset="-120"/>
+              </a:rPr>
+              <a:t>Their items are still calculated and still count in every other group they belong to (e.g. Agricultural Products)</a:t>
+            </a:r>
+            <a:endParaRPr lang="en-US" sz="1400" dirty="0"/>
+          </a:p>
+          <a:p>
+            <a:pPr marL="190500" indent="-190500">
+              <a:spcAft>
+                <a:spcPts val="1000"/>
+              </a:spcAft>
+              <a:buSzPct val="100000"/>
+              <a:buChar char="•"/>
+            </a:pPr>
+            <a:r>
+              <a:rPr lang="en-US" sz="1400" dirty="0">
+                <a:solidFill>
+                  <a:srgbClr val="000000"/>
+                </a:solidFill>
+                <a:latin typeface="Calibri" pitchFamily="34" charset="0"/>
+                <a:ea typeface="Calibri" pitchFamily="34" charset="-122"/>
+                <a:cs typeface="Calibri" pitchFamily="34" charset="-120"/>
+              </a:rPr>
+              <a:t>They are listed in their own section of the dashboard's Dissemination groups tab</a:t>
+            </a:r>
+            <a:endParaRPr lang="en-US" sz="1400" dirty="0"/>
+          </a:p>
+        </p:txBody>
+      </p:sp>
+      <p:sp>
+        <p:nvSpPr>
+          <p:cNvPr id="5" name="Text 3"/>
+          <p:cNvSpPr/>
+          <p:nvPr/>
+        </p:nvSpPr>
+        <p:spPr>
+          <a:xfrm>
+            <a:off x="640080" y="2926080"/>
+            <a:ext cx="5486400" cy="365760"/>
+          </a:xfrm>
+          <a:prstGeom prst="rect">
+            <a:avLst/>
+          </a:prstGeom>
+          <a:noFill/>
+          <a:ln/>
+        </p:spPr>
+        <p:txBody>
+          <a:bodyPr wrap="square" lIns="0" tIns="0" rIns="0" bIns="0" rtlCol="0" anchor="t"/>
+          <a:lstStyle/>
+          <a:p>
+            <a:pPr marL="0" indent="0">
+              <a:buNone/>
+            </a:pPr>
+            <a:r>
+              <a:rPr lang="en-US" sz="1500" b="1" dirty="0">
+                <a:solidFill>
+                  <a:srgbClr val="000000"/>
+                </a:solidFill>
+                <a:latin typeface="Calibri" pitchFamily="34" charset="0"/>
+                <a:ea typeface="Calibri" pitchFamily="34" charset="-122"/>
+                <a:cs typeface="Calibri" pitchFamily="34" charset="-120"/>
+              </a:rPr>
+              <a:t>Excluded groups</a:t>
+            </a:r>
+            <a:endParaRPr lang="en-US" sz="1500" b="1" dirty="0"/>
+          </a:p>
+        </p:txBody>
+      </p:sp>
+      <p:sp>
+        <p:nvSpPr>
+          <p:cNvPr id="4" name="Text 2"/>
+          <p:cNvSpPr/>
+          <p:nvPr/>
+        </p:nvSpPr>
+        <p:spPr>
+          <a:xfrm>
+            <a:off x="640080" y="3291840"/>
+            <a:ext cx="5303520" cy="1828800"/>
+          </a:xfrm>
+          <a:prstGeom prst="rect">
+            <a:avLst/>
+          </a:prstGeom>
+          <a:noFill/>
+          <a:ln/>
+        </p:spPr>
+        <p:txBody>
+          <a:bodyPr wrap="square" lIns="0" tIns="0" rIns="0" bIns="0" rtlCol="0" anchor="t"/>
+          <a:lstStyle/>
+          <a:p>
+            <a:pPr marL="190500" indent="-190500">
+              <a:spcAft>
+                <a:spcPts val="1000"/>
+              </a:spcAft>
+              <a:buSzPct val="100000"/>
+              <a:buChar char="•"/>
+            </a:pPr>
+            <a:r>
+              <a:rPr lang="en-US" sz="1400" dirty="0">
+                <a:solidFill>
+                  <a:srgbClr val="000000"/>
+                </a:solidFill>
+                <a:latin typeface="Calibri" pitchFamily="34" charset="0"/>
+                <a:ea typeface="Calibri" pitchFamily="34" charset="-122"/>
+                <a:cs typeface="Calibri" pitchFamily="34" charset="-120"/>
+              </a:rPr>
+              <a:t>F1898  Hides and skins</a:t>
+            </a:r>
+            <a:endParaRPr lang="en-US" sz="1400" dirty="0"/>
+          </a:p>
+          <a:p>
+            <a:pPr marL="190500" indent="-190500">
+              <a:spcAft>
+                <a:spcPts val="1000"/>
+              </a:spcAft>
+              <a:buSzPct val="100000"/>
+              <a:buChar char="•"/>
+            </a:pPr>
+            <a:r>
+              <a:rPr lang="en-US" sz="1400" dirty="0">
+                <a:solidFill>
+                  <a:srgbClr val="000000"/>
+                </a:solidFill>
+                <a:latin typeface="Calibri" pitchFamily="34" charset="0"/>
+                <a:ea typeface="Calibri" pitchFamily="34" charset="-122"/>
+                <a:cs typeface="Calibri" pitchFamily="34" charset="-120"/>
+              </a:rPr>
+              <a:t>F1900  Natural rubber *</a:t>
+            </a:r>
+            <a:endParaRPr lang="en-US" sz="1400" dirty="0"/>
+          </a:p>
+          <a:p>
+            <a:pPr marL="190500" indent="-190500">
+              <a:spcAft>
+                <a:spcPts val="1000"/>
+              </a:spcAft>
+              <a:buSzPct val="100000"/>
+              <a:buChar char="•"/>
+            </a:pPr>
+            <a:r>
+              <a:rPr lang="en-US" sz="1400" dirty="0">
+                <a:solidFill>
+                  <a:srgbClr val="000000"/>
+                </a:solidFill>
+                <a:latin typeface="Calibri" pitchFamily="34" charset="0"/>
+                <a:ea typeface="Calibri" pitchFamily="34" charset="-122"/>
+                <a:cs typeface="Calibri" pitchFamily="34" charset="-120"/>
+              </a:rPr>
+              <a:t>F1846  Non-edible fats and oils</a:t>
+            </a:r>
+            <a:endParaRPr lang="en-US" sz="1400" dirty="0"/>
+          </a:p>
+          <a:p>
+            <a:pPr marL="190500" indent="-190500">
+              <a:spcAft>
+                <a:spcPts val="1000"/>
+              </a:spcAft>
+              <a:buSzPct val="100000"/>
+              <a:buChar char="•"/>
+            </a:pPr>
+            <a:r>
+              <a:rPr lang="en-US" sz="1400" dirty="0">
+                <a:solidFill>
+                  <a:srgbClr val="000000"/>
+                </a:solidFill>
+                <a:latin typeface="Calibri" pitchFamily="34" charset="0"/>
+                <a:ea typeface="Calibri" pitchFamily="34" charset="-122"/>
+                <a:cs typeface="Calibri" pitchFamily="34" charset="-120"/>
+              </a:rPr>
+              <a:t>F1901  Textile fibres *</a:t>
+            </a:r>
+            <a:endParaRPr lang="en-US" sz="1400" dirty="0"/>
+          </a:p>
+          <a:p>
+            <a:pPr marL="190500" indent="-190500">
+              <a:spcAft>
+                <a:spcPts val="1000"/>
+              </a:spcAft>
+              <a:buSzPct val="100000"/>
+              <a:buChar char="•"/>
+            </a:pPr>
+            <a:r>
+              <a:rPr lang="en-US" sz="1400" dirty="0">
+                <a:solidFill>
+                  <a:srgbClr val="000000"/>
+                </a:solidFill>
+                <a:latin typeface="Calibri" pitchFamily="34" charset="0"/>
+                <a:ea typeface="Calibri" pitchFamily="34" charset="-122"/>
+                <a:cs typeface="Calibri" pitchFamily="34" charset="-120"/>
+              </a:rPr>
+              <a:t>F2076  Other meat</a:t>
+            </a:r>
+            <a:endParaRPr lang="en-US" sz="1400" dirty="0"/>
+          </a:p>
+          <a:p>
+            <a:pPr marL="190500" indent="-190500">
+              <a:spcAft>
+                <a:spcPts val="1000"/>
+              </a:spcAft>
+              <a:buSzPct val="100000"/>
+              <a:buChar char="•"/>
+            </a:pPr>
+            <a:r>
+              <a:rPr lang="en-US" sz="1400" dirty="0">
+                <a:solidFill>
+                  <a:srgbClr val="000000"/>
+                </a:solidFill>
+                <a:latin typeface="Calibri" pitchFamily="34" charset="0"/>
+                <a:ea typeface="Calibri" pitchFamily="34" charset="-122"/>
+                <a:cs typeface="Calibri" pitchFamily="34" charset="-120"/>
+              </a:rPr>
+              <a:t>F1902  Crude materials nes</a:t>
+            </a:r>
+            <a:endParaRPr lang="en-US" sz="1400" dirty="0"/>
+          </a:p>
+        </p:txBody>
+      </p:sp>
+      <p:sp>
+        <p:nvSpPr>
+          <p:cNvPr id="4" name="Text 2"/>
+          <p:cNvSpPr/>
+          <p:nvPr/>
+        </p:nvSpPr>
+        <p:spPr>
+          <a:xfrm>
+            <a:off x="6126480" y="3291840"/>
+            <a:ext cx="5303520" cy="1828800"/>
+          </a:xfrm>
+          <a:prstGeom prst="rect">
+            <a:avLst/>
+          </a:prstGeom>
+          <a:noFill/>
+          <a:ln/>
+        </p:spPr>
+        <p:txBody>
+          <a:bodyPr wrap="square" lIns="0" tIns="0" rIns="0" bIns="0" rtlCol="0" anchor="t"/>
+          <a:lstStyle/>
+          <a:p>
+            <a:pPr marL="190500" indent="-190500">
+              <a:spcAft>
+                <a:spcPts val="1000"/>
+              </a:spcAft>
+              <a:buSzPct val="100000"/>
+              <a:buChar char="•"/>
+            </a:pPr>
+            <a:r>
+              <a:rPr lang="en-US" sz="1400" dirty="0">
+                <a:solidFill>
+                  <a:srgbClr val="000000"/>
+                </a:solidFill>
+                <a:latin typeface="Calibri" pitchFamily="34" charset="0"/>
+                <a:ea typeface="Calibri" pitchFamily="34" charset="-122"/>
+                <a:cs typeface="Calibri" pitchFamily="34" charset="-120"/>
+              </a:rPr>
+              <a:t>F1845  Non-edible crude materials</a:t>
+            </a:r>
+            <a:endParaRPr lang="en-US" sz="1400" dirty="0"/>
+          </a:p>
+          <a:p>
+            <a:pPr marL="190500" indent="-190500">
+              <a:spcAft>
+                <a:spcPts val="1000"/>
+              </a:spcAft>
+              <a:buSzPct val="100000"/>
+              <a:buChar char="•"/>
+            </a:pPr>
+            <a:r>
+              <a:rPr lang="en-US" sz="1400" dirty="0">
+                <a:solidFill>
+                  <a:srgbClr val="000000"/>
+                </a:solidFill>
+                <a:latin typeface="Calibri" pitchFamily="34" charset="0"/>
+                <a:ea typeface="Calibri" pitchFamily="34" charset="-122"/>
+                <a:cs typeface="Calibri" pitchFamily="34" charset="-120"/>
+              </a:rPr>
+              <a:t>F1892  Fodder and feeding stuff</a:t>
+            </a:r>
+            <a:endParaRPr lang="en-US" sz="1400" dirty="0"/>
+          </a:p>
+          <a:p>
+            <a:pPr marL="190500" indent="-190500">
+              <a:spcAft>
+                <a:spcPts val="1000"/>
+              </a:spcAft>
+              <a:buSzPct val="100000"/>
+              <a:buChar char="•"/>
+            </a:pPr>
+            <a:r>
+              <a:rPr lang="en-US" sz="1400" dirty="0">
+                <a:solidFill>
+                  <a:srgbClr val="000000"/>
+                </a:solidFill>
+                <a:latin typeface="Calibri" pitchFamily="34" charset="0"/>
+                <a:ea typeface="Calibri" pitchFamily="34" charset="-122"/>
+                <a:cs typeface="Calibri" pitchFamily="34" charset="-120"/>
+              </a:rPr>
+              <a:t>F1849  Other food nes</a:t>
+            </a:r>
+            <a:endParaRPr lang="en-US" sz="1400" dirty="0"/>
+          </a:p>
+          <a:p>
+            <a:pPr marL="190500" indent="-190500">
+              <a:spcAft>
+                <a:spcPts val="1000"/>
+              </a:spcAft>
+              <a:buSzPct val="100000"/>
+              <a:buChar char="•"/>
+            </a:pPr>
+            <a:r>
+              <a:rPr lang="en-US" sz="1400" dirty="0">
+                <a:solidFill>
+                  <a:srgbClr val="000000"/>
+                </a:solidFill>
+                <a:latin typeface="Calibri" pitchFamily="34" charset="0"/>
+                <a:ea typeface="Calibri" pitchFamily="34" charset="-122"/>
+                <a:cs typeface="Calibri" pitchFamily="34" charset="-120"/>
+              </a:rPr>
+              <a:t>F1847  Non-food</a:t>
+            </a:r>
+            <a:endParaRPr lang="en-US" sz="1400" dirty="0"/>
+          </a:p>
+          <a:p>
+            <a:pPr marL="190500" indent="-190500">
+              <a:spcAft>
+                <a:spcPts val="1000"/>
+              </a:spcAft>
+              <a:buSzPct val="100000"/>
+              <a:buChar char="•"/>
+            </a:pPr>
+            <a:r>
+              <a:rPr lang="en-US" sz="1400" dirty="0">
+                <a:solidFill>
+                  <a:srgbClr val="000000"/>
+                </a:solidFill>
+                <a:latin typeface="Calibri" pitchFamily="34" charset="0"/>
+                <a:ea typeface="Calibri" pitchFamily="34" charset="-122"/>
+                <a:cs typeface="Calibri" pitchFamily="34" charset="-120"/>
+              </a:rPr>
+              <a:t>F1848  Other food</a:t>
+            </a:r>
+            <a:endParaRPr lang="en-US" sz="1400" dirty="0"/>
+          </a:p>
+        </p:txBody>
+      </p:sp>
+      <p:sp>
+        <p:nvSpPr>
+          <p:cNvPr id="7" name="Text 5"/>
+          <p:cNvSpPr/>
+          <p:nvPr/>
+        </p:nvSpPr>
+        <p:spPr>
+          <a:xfrm>
+            <a:off x="640080" y="5577840"/>
+            <a:ext cx="5486400" cy="365760"/>
+          </a:xfrm>
+          <a:prstGeom prst="rect">
+            <a:avLst/>
+          </a:prstGeom>
+          <a:noFill/>
+          <a:ln/>
+        </p:spPr>
+        <p:txBody>
+          <a:bodyPr wrap="square" lIns="0" tIns="0" rIns="0" bIns="0" rtlCol="0" anchor="t"/>
+          <a:lstStyle/>
+          <a:p>
+            <a:pPr marL="0" indent="0">
+              <a:buNone/>
+            </a:pPr>
+            <a:r>
+              <a:rPr lang="en-US" sz="1500" b="1" dirty="0">
+                <a:solidFill>
+                  <a:srgbClr val="000000"/>
+                </a:solidFill>
+                <a:latin typeface="Calibri" pitchFamily="34" charset="0"/>
+                <a:ea typeface="Calibri" pitchFamily="34" charset="-122"/>
+                <a:cs typeface="Calibri" pitchFamily="34" charset="-120"/>
+              </a:rPr>
+              <a:t>Note for next year</a:t>
+            </a:r>
+            <a:endParaRPr lang="en-US" sz="1500" b="1" dirty="0"/>
+          </a:p>
+        </p:txBody>
+      </p:sp>
+      <p:sp>
+        <p:nvSpPr>
+          <p:cNvPr id="8" name="Text 6"/>
+          <p:cNvSpPr/>
+          <p:nvPr/>
+        </p:nvSpPr>
+        <p:spPr>
+          <a:xfrm>
+            <a:off x="640080" y="5943600"/>
+            <a:ext cx="10881360" cy="365760"/>
+          </a:xfrm>
+          <a:prstGeom prst="rect">
+            <a:avLst/>
+          </a:prstGeom>
+          <a:noFill/>
+          <a:ln/>
+        </p:spPr>
+        <p:txBody>
+          <a:bodyPr wrap="square" lIns="0" tIns="0" rIns="0" bIns="0" rtlCol="0" anchor="t"/>
+          <a:lstStyle/>
+          <a:p>
+            <a:pPr marL="0" indent="0">
+              <a:buNone/>
+            </a:pPr>
+            <a:r>
+              <a:rPr lang="en-US" sz="1350" dirty="0">
+                <a:solidFill>
+                  <a:srgbClr val="000000"/>
+                </a:solidFill>
+                <a:latin typeface="Calibri" pitchFamily="34" charset="0"/>
+                <a:ea typeface="Calibri" pitchFamily="34" charset="-122"/>
+                <a:cs typeface="Calibri" pitchFamily="34" charset="-120"/>
+              </a:rPr>
+              <a:t>* Natural rubber (F1900) and Textile fibres (F1901) may be added to the calculations next year.</a:t>
             </a:r>
             <a:endParaRPr lang="en-US" sz="1350" dirty="0"/>
           </a:p>
